--- a/DataAnalysis_Track/decks/DA_S04_Counting_and_grouping.pptx
+++ b/DataAnalysis_Track/decks/DA_S04_Counting_and_grouping.pptx
@@ -480,7 +480,7 @@
 </file>
 
 <file path=ppt/notesSlides/notesSlide1.xml><?xml version="1.0" encoding="utf-8"?>
-<p:notes xmlns:a="http://schemas.openxmlformats.org/drawingml/2006/main" xmlns:p="http://schemas.openxmlformats.org/presentationml/2006/main" xmlns:r="http://schemas.openxmlformats.org/officeDocument/2006/relationships">
+<p:notes xmlns:a="http://schemas.openxmlformats.org/drawingml/2006/main" xmlns:p="http://schemas.openxmlformats.org/presentationml/2006/main">
   <p:cSld>
     <p:spTree>
       <p:nvGrpSpPr>
@@ -524,7 +524,87 @@
           <a:lstStyle/>
           <a:p>
             <a:r>
+              <a:t>TEACHING PURPOSE</a:t>
+            </a:r>
+          </a:p>
+          <a:p>
+            <a:r>
+              <a:t>Counting and grouping</a:t>
+            </a:r>
+          </a:p>
+          <a:p>
+            <a:r>
+              <a:t/>
+            </a:r>
+          </a:p>
+          <a:p>
+            <a:r>
+              <a:t>LECTURER CUE</a:t>
+            </a:r>
+          </a:p>
+          <a:p>
+            <a:r>
               <a:t>Start on time.</a:t>
+            </a:r>
+          </a:p>
+          <a:p>
+            <a:r>
+              <a:t/>
+            </a:r>
+          </a:p>
+          <a:p>
+            <a:r>
+              <a:t>EXPLAIN IN ORDINARY WORDS</a:t>
+            </a:r>
+          </a:p>
+          <a:p>
+            <a:r>
+              <a:t>Grouping puts rows sharing a key into buckets, then computes a result for each bucket. WHERE filters rows before SQL grouping; HAVING filters grouped results.</a:t>
+            </a:r>
+          </a:p>
+          <a:p>
+            <a:r>
+              <a:t/>
+            </a:r>
+          </a:p>
+          <a:p>
+            <a:r>
+              <a:t>CHECK AND EXPECTED ANSWER</a:t>
+            </a:r>
+          </a:p>
+          <a:p>
+            <a:r>
+              <a:t>Which condition keeps only groups with more than five rows? HAVING COUNT(*) &gt; 5.</a:t>
+            </a:r>
+          </a:p>
+          <a:p>
+            <a:r>
+              <a:t/>
+            </a:r>
+          </a:p>
+          <a:p>
+            <a:r>
+              <a:t>IF LEARNERS ARE STUCK</a:t>
+            </a:r>
+          </a:p>
+          <a:p>
+            <a:r>
+              <a:t>Draw two buckets and count by hand. Name the intended output grain before writing the aggregation.</a:t>
+            </a:r>
+          </a:p>
+          <a:p>
+            <a:r>
+              <a:t/>
+            </a:r>
+          </a:p>
+          <a:p>
+            <a:r>
+              <a:t>NEXT</a:t>
+            </a:r>
+          </a:p>
+          <a:p>
+            <a:r>
+              <a:t>Where tonight sits. Move on after a learner can explain the current example or required action.</a:t>
             </a:r>
           </a:p>
         </p:txBody>
@@ -550,7 +630,7 @@
 </file>
 
 <file path=ppt/notesSlides/notesSlide10.xml><?xml version="1.0" encoding="utf-8"?>
-<p:notes xmlns:a="http://schemas.openxmlformats.org/drawingml/2006/main" xmlns:p="http://schemas.openxmlformats.org/presentationml/2006/main" xmlns:r="http://schemas.openxmlformats.org/officeDocument/2006/relationships">
+<p:notes xmlns:a="http://schemas.openxmlformats.org/drawingml/2006/main" xmlns:p="http://schemas.openxmlformats.org/presentationml/2006/main">
   <p:cSld>
     <p:spTree>
       <p:nvGrpSpPr>
@@ -592,7 +672,91 @@
         <p:txBody>
           <a:bodyPr/>
           <a:lstStyle/>
-          <a:p/>
+          <a:p>
+            <a:r>
+              <a:t>TEACHING PURPOSE</a:t>
+            </a:r>
+          </a:p>
+          <a:p>
+            <a:r>
+              <a:t>The same answer, both ways</a:t>
+            </a:r>
+          </a:p>
+          <a:p>
+            <a:r>
+              <a:t/>
+            </a:r>
+          </a:p>
+          <a:p>
+            <a:r>
+              <a:t>CONNECT</a:t>
+            </a:r>
+          </a:p>
+          <a:p>
+            <a:r>
+              <a:t>Build on the preceding slide: Derived value.</a:t>
+            </a:r>
+          </a:p>
+          <a:p>
+            <a:r>
+              <a:t/>
+            </a:r>
+          </a:p>
+          <a:p>
+            <a:r>
+              <a:t>EXPLAIN IN ORDINARY WORDS</a:t>
+            </a:r>
+          </a:p>
+          <a:p>
+            <a:r>
+              <a:t>Grouping puts rows sharing a key into buckets, then computes a result for each bucket. WHERE filters rows before SQL grouping; HAVING filters grouped results.</a:t>
+            </a:r>
+          </a:p>
+          <a:p>
+            <a:r>
+              <a:t/>
+            </a:r>
+          </a:p>
+          <a:p>
+            <a:r>
+              <a:t>CHECK AND EXPECTED ANSWER</a:t>
+            </a:r>
+          </a:p>
+          <a:p>
+            <a:r>
+              <a:t>Which condition keeps only groups with more than five rows? HAVING COUNT(*) &gt; 5.</a:t>
+            </a:r>
+          </a:p>
+          <a:p>
+            <a:r>
+              <a:t/>
+            </a:r>
+          </a:p>
+          <a:p>
+            <a:r>
+              <a:t>IF LEARNERS ARE STUCK</a:t>
+            </a:r>
+          </a:p>
+          <a:p>
+            <a:r>
+              <a:t>Draw two buckets and count by hand. Name the intended output grain before writing the aggregation.</a:t>
+            </a:r>
+          </a:p>
+          <a:p>
+            <a:r>
+              <a:t/>
+            </a:r>
+          </a:p>
+          <a:p>
+            <a:r>
+              <a:t>NEXT</a:t>
+            </a:r>
+          </a:p>
+          <a:p>
+            <a:r>
+              <a:t>Break. Move on after a learner can explain the current example or required action.</a:t>
+            </a:r>
+          </a:p>
         </p:txBody>
       </p:sp>
       <p:sp>
@@ -615,8 +779,8 @@
 </p:notes>
 </file>
 
-<file path=ppt/notesSlides/notesSlide11.xml><?xml version="1.0" encoding="utf-8"?>
-<p:notes xmlns:a="http://schemas.openxmlformats.org/drawingml/2006/main" xmlns:p="http://schemas.openxmlformats.org/presentationml/2006/main" xmlns:r="http://schemas.openxmlformats.org/officeDocument/2006/relationships">
+<file path=ppt/notesSlides/notesSlide10006.xml><?xml version="1.0" encoding="utf-8"?>
+<p:notes xmlns:a="http://schemas.openxmlformats.org/drawingml/2006/main" xmlns:p="http://schemas.openxmlformats.org/presentationml/2006/main">
   <p:cSld>
     <p:spTree>
       <p:nvGrpSpPr>
@@ -660,7 +824,57 @@
           <a:lstStyle/>
           <a:p>
             <a:r>
-              <a:t>Ten minutes.</a:t>
+              <a:t>TEACHING PURPOSE</a:t>
+            </a:r>
+          </a:p>
+          <a:p>
+            <a:r>
+              <a:t>Your pivot table, written down</a:t>
+            </a:r>
+          </a:p>
+          <a:p>
+            <a:r>
+              <a:t/>
+            </a:r>
+          </a:p>
+          <a:p>
+            <a:r>
+              <a:t>CONNECT</a:t>
+            </a:r>
+          </a:p>
+          <a:p>
+            <a:r>
+              <a:t>Build on the preceding slide: You can already build a pivot table..</a:t>
+            </a:r>
+          </a:p>
+          <a:p>
+            <a:r>
+              <a:t/>
+            </a:r>
+          </a:p>
+          <a:p>
+            <a:r>
+              <a:t>DELIVER THIS SLIDE</a:t>
+            </a:r>
+          </a:p>
+          <a:p>
+            <a:r>
+              <a:t>Read the stated purpose, then point to the named example or action on the slide. Ask learners to describe what they will do before moving on. For a break slide, announce the return time; for a section divider, name the next concrete task.</a:t>
+            </a:r>
+          </a:p>
+          <a:p>
+            <a:r>
+              <a:t/>
+            </a:r>
+          </a:p>
+          <a:p>
+            <a:r>
+              <a:t>NEXT</a:t>
+            </a:r>
+          </a:p>
+          <a:p>
+            <a:r>
+              <a:t>Aggregate. Move on after a learner can explain the current example or required action.</a:t>
             </a:r>
           </a:p>
         </p:txBody>
@@ -685,8 +899,8 @@
 </p:notes>
 </file>
 
-<file path=ppt/notesSlides/notesSlide12.xml><?xml version="1.0" encoding="utf-8"?>
-<p:notes xmlns:a="http://schemas.openxmlformats.org/drawingml/2006/main" xmlns:p="http://schemas.openxmlformats.org/presentationml/2006/main" xmlns:r="http://schemas.openxmlformats.org/officeDocument/2006/relationships">
+<file path=ppt/notesSlides/notesSlide10013.xml><?xml version="1.0" encoding="utf-8"?>
+<p:notes xmlns:a="http://schemas.openxmlformats.org/drawingml/2006/main" xmlns:p="http://schemas.openxmlformats.org/presentationml/2006/main">
   <p:cSld>
     <p:spTree>
       <p:nvGrpSpPr>
@@ -728,7 +942,91 @@
         <p:txBody>
           <a:bodyPr/>
           <a:lstStyle/>
-          <a:p/>
+          <a:p>
+            <a:r>
+              <a:t>TEACHING PURPOSE</a:t>
+            </a:r>
+          </a:p>
+          <a:p>
+            <a:r>
+              <a:t>Filtering groups, and the trap in every average</a:t>
+            </a:r>
+          </a:p>
+          <a:p>
+            <a:r>
+              <a:t/>
+            </a:r>
+          </a:p>
+          <a:p>
+            <a:r>
+              <a:t>CONNECT</a:t>
+            </a:r>
+          </a:p>
+          <a:p>
+            <a:r>
+              <a:t>Build on the preceding slide: Break.</a:t>
+            </a:r>
+          </a:p>
+          <a:p>
+            <a:r>
+              <a:t/>
+            </a:r>
+          </a:p>
+          <a:p>
+            <a:r>
+              <a:t>EXPLAIN IN ORDINARY WORDS</a:t>
+            </a:r>
+          </a:p>
+          <a:p>
+            <a:r>
+              <a:t>Grouping puts rows sharing a key into buckets, then computes a result for each bucket. WHERE filters rows before SQL grouping; HAVING filters grouped results.</a:t>
+            </a:r>
+          </a:p>
+          <a:p>
+            <a:r>
+              <a:t/>
+            </a:r>
+          </a:p>
+          <a:p>
+            <a:r>
+              <a:t>CHECK AND EXPECTED ANSWER</a:t>
+            </a:r>
+          </a:p>
+          <a:p>
+            <a:r>
+              <a:t>Which condition keeps only groups with more than five rows? HAVING COUNT(*) &gt; 5.</a:t>
+            </a:r>
+          </a:p>
+          <a:p>
+            <a:r>
+              <a:t/>
+            </a:r>
+          </a:p>
+          <a:p>
+            <a:r>
+              <a:t>IF LEARNERS ARE STUCK</a:t>
+            </a:r>
+          </a:p>
+          <a:p>
+            <a:r>
+              <a:t>Draw two buckets and count by hand. Name the intended output grain before writing the aggregation.</a:t>
+            </a:r>
+          </a:p>
+          <a:p>
+            <a:r>
+              <a:t/>
+            </a:r>
+          </a:p>
+          <a:p>
+            <a:r>
+              <a:t>NEXT</a:t>
+            </a:r>
+          </a:p>
+          <a:p>
+            <a:r>
+              <a:t>Revenue, which is not a column. Move on after a learner can explain the current example or required action.</a:t>
+            </a:r>
+          </a:p>
         </p:txBody>
       </p:sp>
       <p:sp>
@@ -751,8 +1049,8 @@
 </p:notes>
 </file>
 
-<file path=ppt/notesSlides/notesSlide13.xml><?xml version="1.0" encoding="utf-8"?>
-<p:notes xmlns:a="http://schemas.openxmlformats.org/drawingml/2006/main" xmlns:p="http://schemas.openxmlformats.org/presentationml/2006/main" xmlns:r="http://schemas.openxmlformats.org/officeDocument/2006/relationships">
+<file path=ppt/notesSlides/notesSlide11.xml><?xml version="1.0" encoding="utf-8"?>
+<p:notes xmlns:a="http://schemas.openxmlformats.org/drawingml/2006/main" xmlns:p="http://schemas.openxmlformats.org/presentationml/2006/main">
   <p:cSld>
     <p:spTree>
       <p:nvGrpSpPr>
@@ -794,7 +1092,61 @@
         <p:txBody>
           <a:bodyPr/>
           <a:lstStyle/>
-          <a:p/>
+          <a:p>
+            <a:r>
+              <a:t>TEACHING PURPOSE</a:t>
+            </a:r>
+          </a:p>
+          <a:p>
+            <a:r>
+              <a:t>Break</a:t>
+            </a:r>
+          </a:p>
+          <a:p>
+            <a:r>
+              <a:t/>
+            </a:r>
+          </a:p>
+          <a:p>
+            <a:r>
+              <a:t>CONNECT</a:t>
+            </a:r>
+          </a:p>
+          <a:p>
+            <a:r>
+              <a:t>Build on the preceding slide: The same answer, both ways.</a:t>
+            </a:r>
+          </a:p>
+          <a:p>
+            <a:r>
+              <a:t/>
+            </a:r>
+          </a:p>
+          <a:p>
+            <a:r>
+              <a:t>LECTURER CUE</a:t>
+            </a:r>
+          </a:p>
+          <a:p>
+            <a:r>
+              <a:t>Ten minutes.</a:t>
+            </a:r>
+          </a:p>
+          <a:p>
+            <a:r>
+              <a:t/>
+            </a:r>
+          </a:p>
+          <a:p>
+            <a:r>
+              <a:t>NEXT</a:t>
+            </a:r>
+          </a:p>
+          <a:p>
+            <a:r>
+              <a:t>Filtering groups, and the trap in every average. Move on after a learner can explain the current example or required action.</a:t>
+            </a:r>
+          </a:p>
         </p:txBody>
       </p:sp>
       <p:sp>
@@ -817,8 +1169,8 @@
 </p:notes>
 </file>
 
-<file path=ppt/notesSlides/notesSlide14.xml><?xml version="1.0" encoding="utf-8"?>
-<p:notes xmlns:a="http://schemas.openxmlformats.org/drawingml/2006/main" xmlns:p="http://schemas.openxmlformats.org/presentationml/2006/main" xmlns:r="http://schemas.openxmlformats.org/officeDocument/2006/relationships">
+<file path=ppt/notesSlides/notesSlide12.xml><?xml version="1.0" encoding="utf-8"?>
+<p:notes xmlns:a="http://schemas.openxmlformats.org/drawingml/2006/main" xmlns:p="http://schemas.openxmlformats.org/presentationml/2006/main">
   <p:cSld>
     <p:spTree>
       <p:nvGrpSpPr>
@@ -862,7 +1214,87 @@
           <a:lstStyle/>
           <a:p>
             <a:r>
-              <a:t>Four regions, four average order values. The national average is not the average of those four, and the gap is not small.</a:t>
+              <a:t>TEACHING PURPOSE</a:t>
+            </a:r>
+          </a:p>
+          <a:p>
+            <a:r>
+              <a:t>Revenue, which is not a column</a:t>
+            </a:r>
+          </a:p>
+          <a:p>
+            <a:r>
+              <a:t/>
+            </a:r>
+          </a:p>
+          <a:p>
+            <a:r>
+              <a:t>CONNECT</a:t>
+            </a:r>
+          </a:p>
+          <a:p>
+            <a:r>
+              <a:t>Build on the preceding slide: Filtering groups, and the trap in every average.</a:t>
+            </a:r>
+          </a:p>
+          <a:p>
+            <a:r>
+              <a:t/>
+            </a:r>
+          </a:p>
+          <a:p>
+            <a:r>
+              <a:t>EXPLAIN IN ORDINARY WORDS</a:t>
+            </a:r>
+          </a:p>
+          <a:p>
+            <a:r>
+              <a:t>Grain means what one row represents. A key identifies a row; a primary key may use more than one column. A join matches keys, and multiple matches can multiply rows.</a:t>
+            </a:r>
+          </a:p>
+          <a:p>
+            <a:r>
+              <a:t/>
+            </a:r>
+          </a:p>
+          <a:p>
+            <a:r>
+              <a:t>CHECK AND EXPECTED ANSWER</a:t>
+            </a:r>
+          </a:p>
+          <a:p>
+            <a:r>
+              <a:t>One order has two lines. After joining orders to lines, how many rows for it? Two. Summing a repeated order-level total would double-count.</a:t>
+            </a:r>
+          </a:p>
+          <a:p>
+            <a:r>
+              <a:t/>
+            </a:r>
+          </a:p>
+          <a:p>
+            <a:r>
+              <a:t>IF LEARNERS ARE STUCK</a:t>
+            </a:r>
+          </a:p>
+          <a:p>
+            <a:r>
+              <a:t>Write one example row from each table. Circle keys and trace each match. Aggregate to the intended grain and check counts and totals.</a:t>
+            </a:r>
+          </a:p>
+          <a:p>
+            <a:r>
+              <a:t/>
+            </a:r>
+          </a:p>
+          <a:p>
+            <a:r>
+              <a:t>NEXT</a:t>
+            </a:r>
+          </a:p>
+          <a:p>
+            <a:r>
+              <a:t>HAVING, after getting it wrong first. Move on after a learner can explain the current example or required action.</a:t>
             </a:r>
           </a:p>
         </p:txBody>
@@ -887,8 +1319,8 @@
 </p:notes>
 </file>
 
-<file path=ppt/notesSlides/notesSlide15.xml><?xml version="1.0" encoding="utf-8"?>
-<p:notes xmlns:a="http://schemas.openxmlformats.org/drawingml/2006/main" xmlns:p="http://schemas.openxmlformats.org/presentationml/2006/main" xmlns:r="http://schemas.openxmlformats.org/officeDocument/2006/relationships">
+<file path=ppt/notesSlides/notesSlide13.xml><?xml version="1.0" encoding="utf-8"?>
+<p:notes xmlns:a="http://schemas.openxmlformats.org/drawingml/2006/main" xmlns:p="http://schemas.openxmlformats.org/presentationml/2006/main">
   <p:cSld>
     <p:spTree>
       <p:nvGrpSpPr>
@@ -932,7 +1364,87 @@
           <a:lstStyle/>
           <a:p>
             <a:r>
-              <a:t>Averaging an average. The average of four regional averages is not the national average unless the regions are the same size. Sum the top, sum the bottom, then divide.</a:t>
+              <a:t>TEACHING PURPOSE</a:t>
+            </a:r>
+          </a:p>
+          <a:p>
+            <a:r>
+              <a:t>HAVING, after getting it wrong first</a:t>
+            </a:r>
+          </a:p>
+          <a:p>
+            <a:r>
+              <a:t/>
+            </a:r>
+          </a:p>
+          <a:p>
+            <a:r>
+              <a:t>CONNECT</a:t>
+            </a:r>
+          </a:p>
+          <a:p>
+            <a:r>
+              <a:t>Build on the preceding slide: Revenue, which is not a column.</a:t>
+            </a:r>
+          </a:p>
+          <a:p>
+            <a:r>
+              <a:t/>
+            </a:r>
+          </a:p>
+          <a:p>
+            <a:r>
+              <a:t>EXPLAIN IN ORDINARY WORDS</a:t>
+            </a:r>
+          </a:p>
+          <a:p>
+            <a:r>
+              <a:t>Grouping puts rows sharing a key into buckets, then computes a result for each bucket. WHERE filters rows before SQL grouping; HAVING filters grouped results.</a:t>
+            </a:r>
+          </a:p>
+          <a:p>
+            <a:r>
+              <a:t/>
+            </a:r>
+          </a:p>
+          <a:p>
+            <a:r>
+              <a:t>CHECK AND EXPECTED ANSWER</a:t>
+            </a:r>
+          </a:p>
+          <a:p>
+            <a:r>
+              <a:t>Which condition keeps only groups with more than five rows? HAVING COUNT(*) &gt; 5.</a:t>
+            </a:r>
+          </a:p>
+          <a:p>
+            <a:r>
+              <a:t/>
+            </a:r>
+          </a:p>
+          <a:p>
+            <a:r>
+              <a:t>IF LEARNERS ARE STUCK</a:t>
+            </a:r>
+          </a:p>
+          <a:p>
+            <a:r>
+              <a:t>Draw two buckets and count by hand. Name the intended output grain before writing the aggregation.</a:t>
+            </a:r>
+          </a:p>
+          <a:p>
+            <a:r>
+              <a:t/>
+            </a:r>
+          </a:p>
+          <a:p>
+            <a:r>
+              <a:t>NEXT</a:t>
+            </a:r>
+          </a:p>
+          <a:p>
+            <a:r>
+              <a:t>When averaging averages gives a wrong result. Move on after a learner can explain the current example or required action.</a:t>
             </a:r>
           </a:p>
         </p:txBody>
@@ -957,8 +1469,8 @@
 </p:notes>
 </file>
 
-<file path=ppt/notesSlides/notesSlide16.xml><?xml version="1.0" encoding="utf-8"?>
-<p:notes xmlns:a="http://schemas.openxmlformats.org/drawingml/2006/main" xmlns:p="http://schemas.openxmlformats.org/presentationml/2006/main" xmlns:r="http://schemas.openxmlformats.org/officeDocument/2006/relationships">
+<file path=ppt/notesSlides/notesSlide14.xml><?xml version="1.0" encoding="utf-8"?>
+<p:notes xmlns:a="http://schemas.openxmlformats.org/drawingml/2006/main" xmlns:p="http://schemas.openxmlformats.org/presentationml/2006/main">
   <p:cSld>
     <p:spTree>
       <p:nvGrpSpPr>
@@ -1000,7 +1512,61 @@
         <p:txBody>
           <a:bodyPr/>
           <a:lstStyle/>
-          <a:p/>
+          <a:p>
+            <a:r>
+              <a:t>TEACHING PURPOSE</a:t>
+            </a:r>
+          </a:p>
+          <a:p>
+            <a:r>
+              <a:t>When averaging averages gives a wrong result</a:t>
+            </a:r>
+          </a:p>
+          <a:p>
+            <a:r>
+              <a:t/>
+            </a:r>
+          </a:p>
+          <a:p>
+            <a:r>
+              <a:t>CONNECT</a:t>
+            </a:r>
+          </a:p>
+          <a:p>
+            <a:r>
+              <a:t>Build on the preceding slide: HAVING, after getting it wrong first.</a:t>
+            </a:r>
+          </a:p>
+          <a:p>
+            <a:r>
+              <a:t/>
+            </a:r>
+          </a:p>
+          <a:p>
+            <a:r>
+              <a:t>LECTURER CUE</a:t>
+            </a:r>
+          </a:p>
+          <a:p>
+            <a:r>
+              <a:t>Four regions, four average order values. The national average is not the average of those four, and the gap is not small.</a:t>
+            </a:r>
+          </a:p>
+          <a:p>
+            <a:r>
+              <a:t/>
+            </a:r>
+          </a:p>
+          <a:p>
+            <a:r>
+              <a:t>NEXT</a:t>
+            </a:r>
+          </a:p>
+          <a:p>
+            <a:r>
+              <a:t>Averaging an average. The average of four regional averages is not the national average unless the regions are the same size. Sum the top, sum the bottom, then divide.. Move on after a learner can explain the current example or required action.</a:t>
+            </a:r>
+          </a:p>
         </p:txBody>
       </p:sp>
       <p:sp>
@@ -1023,8 +1589,8 @@
 </p:notes>
 </file>
 
-<file path=ppt/notesSlides/notesSlide17.xml><?xml version="1.0" encoding="utf-8"?>
-<p:notes xmlns:a="http://schemas.openxmlformats.org/drawingml/2006/main" xmlns:p="http://schemas.openxmlformats.org/presentationml/2006/main" xmlns:r="http://schemas.openxmlformats.org/officeDocument/2006/relationships">
+<file path=ppt/notesSlides/notesSlide15.xml><?xml version="1.0" encoding="utf-8"?>
+<p:notes xmlns:a="http://schemas.openxmlformats.org/drawingml/2006/main" xmlns:p="http://schemas.openxmlformats.org/presentationml/2006/main">
   <p:cSld>
     <p:spTree>
       <p:nvGrpSpPr>
@@ -1066,7 +1632,61 @@
         <p:txBody>
           <a:bodyPr/>
           <a:lstStyle/>
-          <a:p/>
+          <a:p>
+            <a:r>
+              <a:t>TEACHING PURPOSE</a:t>
+            </a:r>
+          </a:p>
+          <a:p>
+            <a:r>
+              <a:t>Averaging an average. The average of four regional averages is not the national average unless the regions are the same size. Sum the top, sum the bottom, then divide.</a:t>
+            </a:r>
+          </a:p>
+          <a:p>
+            <a:r>
+              <a:t/>
+            </a:r>
+          </a:p>
+          <a:p>
+            <a:r>
+              <a:t>CONNECT</a:t>
+            </a:r>
+          </a:p>
+          <a:p>
+            <a:r>
+              <a:t>Build on the preceding slide: When averaging averages gives a wrong result.</a:t>
+            </a:r>
+          </a:p>
+          <a:p>
+            <a:r>
+              <a:t/>
+            </a:r>
+          </a:p>
+          <a:p>
+            <a:r>
+              <a:t>LECTURER CUE</a:t>
+            </a:r>
+          </a:p>
+          <a:p>
+            <a:r>
+              <a:t>Averaging an average. The average of four regional averages is not the national average unless the regions are the same size. Sum the top, sum the bottom, then divide.</a:t>
+            </a:r>
+          </a:p>
+          <a:p>
+            <a:r>
+              <a:t/>
+            </a:r>
+          </a:p>
+          <a:p>
+            <a:r>
+              <a:t>NEXT</a:t>
+            </a:r>
+          </a:p>
+          <a:p>
+            <a:r>
+              <a:t>Can you answer these?. Move on after a learner can explain the current example or required action.</a:t>
+            </a:r>
+          </a:p>
         </p:txBody>
       </p:sp>
       <p:sp>
@@ -1089,8 +1709,8 @@
 </p:notes>
 </file>
 
-<file path=ppt/notesSlides/notesSlide18.xml><?xml version="1.0" encoding="utf-8"?>
-<p:notes xmlns:a="http://schemas.openxmlformats.org/drawingml/2006/main" xmlns:p="http://schemas.openxmlformats.org/presentationml/2006/main" xmlns:r="http://schemas.openxmlformats.org/officeDocument/2006/relationships">
+<file path=ppt/notesSlides/notesSlide16.xml><?xml version="1.0" encoding="utf-8"?>
+<p:notes xmlns:a="http://schemas.openxmlformats.org/drawingml/2006/main" xmlns:p="http://schemas.openxmlformats.org/presentationml/2006/main">
   <p:cSld>
     <p:spTree>
       <p:nvGrpSpPr>
@@ -1134,7 +1754,127 @@
           <a:lstStyle/>
           <a:p>
             <a:r>
-              <a:t>Revenue by channel, by segment and by month, delivered orders only. Then export the order lines to CSV, build the same three figures as pivot tables, and confirm they agree. Where they disagree, the SQL is usually right and the pivot has quietly included something.</a:t>
+              <a:t>TEACHING PURPOSE</a:t>
+            </a:r>
+          </a:p>
+          <a:p>
+            <a:r>
+              <a:t>Can you answer these?</a:t>
+            </a:r>
+          </a:p>
+          <a:p>
+            <a:r>
+              <a:t/>
+            </a:r>
+          </a:p>
+          <a:p>
+            <a:r>
+              <a:t>CONNECT</a:t>
+            </a:r>
+          </a:p>
+          <a:p>
+            <a:r>
+              <a:t>Build on the preceding slide: Averaging an average. The average of four regional averages is not the national average unless the regions are the same size. Sum the top, sum the bottom, then divide..</a:t>
+            </a:r>
+          </a:p>
+          <a:p>
+            <a:r>
+              <a:t/>
+            </a:r>
+          </a:p>
+          <a:p>
+            <a:r>
+              <a:t>DISCUSSION KEY FOR THIS SLIDE</a:t>
+            </a:r>
+          </a:p>
+          <a:p>
+            <a:r>
+              <a:t>ANSWERS</a:t>
+            </a:r>
+          </a:p>
+          <a:p>
+            <a:r>
+              <a:t>How did you do?</a:t>
+            </a:r>
+          </a:p>
+          <a:p>
+            <a:r>
+              <a:t>A</a:t>
+            </a:r>
+          </a:p>
+          <a:p>
+            <a:r>
+              <a:t>Why WHERE COUNT(*) &gt; 80 fails</a:t>
+            </a:r>
+          </a:p>
+          <a:p>
+            <a:r>
+              <a:t>WHERE is evaluated before the rows are grouped, so no count exists yet. Filtering on an aggregate is what HAVING is for.</a:t>
+            </a:r>
+          </a:p>
+          <a:p>
+            <a:r>
+              <a:t>B</a:t>
+            </a:r>
+          </a:p>
+          <a:p>
+            <a:r>
+              <a:t>Regional totals not adding up</a:t>
+            </a:r>
+          </a:p>
+          <a:p>
+            <a:r>
+              <a:t>Grouping by region needs a join to customers, and the 172 walk-in orders have no customer to join to. They drop out silently, taking UGX 390,632,335 with them.</a:t>
+            </a:r>
+          </a:p>
+          <a:p>
+            <a:r>
+              <a:t>C</a:t>
+            </a:r>
+          </a:p>
+          <a:p>
+            <a:r>
+              <a:t>Average order value three times too small</a:t>
+            </a:r>
+          </a:p>
+          <a:p>
+            <a:r>
+              <a:t>You divided by the number of order LINES instead of the number of ORDERS. There are 20,234 lines and 6,000 orders. COUNT(DISTINCT order_id) is the fix, and it is the grain lesson from session 1 arriving in arithmetic.</a:t>
+            </a:r>
+          </a:p>
+          <a:p>
+            <a:r>
+              <a:t>Let learners attempt first; use this to explain the reasoning, not just reveal the answer.</a:t>
+            </a:r>
+          </a:p>
+          <a:p>
+            <a:r>
+              <a:t/>
+            </a:r>
+          </a:p>
+          <a:p>
+            <a:r>
+              <a:t>DELIVER THIS SLIDE</a:t>
+            </a:r>
+          </a:p>
+          <a:p>
+            <a:r>
+              <a:t>Read the stated purpose, then point to the named example or action on the slide. Ask learners to describe what they will do before moving on. For a break slide, announce the return time; for a section divider, name the next concrete task.</a:t>
+            </a:r>
+          </a:p>
+          <a:p>
+            <a:r>
+              <a:t/>
+            </a:r>
+          </a:p>
+          <a:p>
+            <a:r>
+              <a:t>NEXT</a:t>
+            </a:r>
+          </a:p>
+          <a:p>
+            <a:r>
+              <a:t>How did you do?. Move on after a learner can explain the current example or required action.</a:t>
             </a:r>
           </a:p>
         </p:txBody>
@@ -1159,8 +1899,8 @@
 </p:notes>
 </file>
 
-<file path=ppt/notesSlides/notesSlide19.xml><?xml version="1.0" encoding="utf-8"?>
-<p:notes xmlns:a="http://schemas.openxmlformats.org/drawingml/2006/main" xmlns:p="http://schemas.openxmlformats.org/presentationml/2006/main" xmlns:r="http://schemas.openxmlformats.org/officeDocument/2006/relationships">
+<file path=ppt/notesSlides/notesSlide17.xml><?xml version="1.0" encoding="utf-8"?>
+<p:notes xmlns:a="http://schemas.openxmlformats.org/drawingml/2006/main" xmlns:p="http://schemas.openxmlformats.org/presentationml/2006/main">
   <p:cSld>
     <p:spTree>
       <p:nvGrpSpPr>
@@ -1202,7 +1942,91 @@
         <p:txBody>
           <a:bodyPr/>
           <a:lstStyle/>
-          <a:p/>
+          <a:p>
+            <a:r>
+              <a:t>TEACHING PURPOSE</a:t>
+            </a:r>
+          </a:p>
+          <a:p>
+            <a:r>
+              <a:t>How did you do?</a:t>
+            </a:r>
+          </a:p>
+          <a:p>
+            <a:r>
+              <a:t/>
+            </a:r>
+          </a:p>
+          <a:p>
+            <a:r>
+              <a:t>CONNECT</a:t>
+            </a:r>
+          </a:p>
+          <a:p>
+            <a:r>
+              <a:t>Build on the preceding slide: Can you answer these?.</a:t>
+            </a:r>
+          </a:p>
+          <a:p>
+            <a:r>
+              <a:t/>
+            </a:r>
+          </a:p>
+          <a:p>
+            <a:r>
+              <a:t>EXPLAIN IN ORDINARY WORDS</a:t>
+            </a:r>
+          </a:p>
+          <a:p>
+            <a:r>
+              <a:t>Grain means what one row represents. A key identifies a row; a primary key may use more than one column. A join matches keys, and multiple matches can multiply rows.</a:t>
+            </a:r>
+          </a:p>
+          <a:p>
+            <a:r>
+              <a:t/>
+            </a:r>
+          </a:p>
+          <a:p>
+            <a:r>
+              <a:t>CHECK AND EXPECTED ANSWER</a:t>
+            </a:r>
+          </a:p>
+          <a:p>
+            <a:r>
+              <a:t>One order has two lines. After joining orders to lines, how many rows for it? Two. Summing a repeated order-level total would double-count.</a:t>
+            </a:r>
+          </a:p>
+          <a:p>
+            <a:r>
+              <a:t/>
+            </a:r>
+          </a:p>
+          <a:p>
+            <a:r>
+              <a:t>IF LEARNERS ARE STUCK</a:t>
+            </a:r>
+          </a:p>
+          <a:p>
+            <a:r>
+              <a:t>Write one example row from each table. Circle keys and trace each match. Aggregate to the intended grain and check counts and totals.</a:t>
+            </a:r>
+          </a:p>
+          <a:p>
+            <a:r>
+              <a:t/>
+            </a:r>
+          </a:p>
+          <a:p>
+            <a:r>
+              <a:t>NEXT</a:t>
+            </a:r>
+          </a:p>
+          <a:p>
+            <a:r>
+              <a:t>Three groupings, then check them in Excel. Move on after a learner can explain the current example or required action.</a:t>
+            </a:r>
+          </a:p>
         </p:txBody>
       </p:sp>
       <p:sp>
@@ -1225,8 +2049,8 @@
 </p:notes>
 </file>
 
-<file path=ppt/notesSlides/notesSlide2.xml><?xml version="1.0" encoding="utf-8"?>
-<p:notes xmlns:a="http://schemas.openxmlformats.org/drawingml/2006/main" xmlns:p="http://schemas.openxmlformats.org/presentationml/2006/main" xmlns:r="http://schemas.openxmlformats.org/officeDocument/2006/relationships">
+<file path=ppt/notesSlides/notesSlide18.xml><?xml version="1.0" encoding="utf-8"?>
+<p:notes xmlns:a="http://schemas.openxmlformats.org/drawingml/2006/main" xmlns:p="http://schemas.openxmlformats.org/presentationml/2006/main">
   <p:cSld>
     <p:spTree>
       <p:nvGrpSpPr>
@@ -1270,7 +2094,102 @@
           <a:lstStyle/>
           <a:p>
             <a:r>
-              <a:t>Tonight is session 4 of twelve.</a:t>
+              <a:t>TEACHING PURPOSE</a:t>
+            </a:r>
+          </a:p>
+          <a:p>
+            <a:r>
+              <a:t>Three groupings, then check them in Excel</a:t>
+            </a:r>
+          </a:p>
+          <a:p>
+            <a:r>
+              <a:t/>
+            </a:r>
+          </a:p>
+          <a:p>
+            <a:r>
+              <a:t>CONNECT</a:t>
+            </a:r>
+          </a:p>
+          <a:p>
+            <a:r>
+              <a:t>Build on the preceding slide: How did you do?.</a:t>
+            </a:r>
+          </a:p>
+          <a:p>
+            <a:r>
+              <a:t/>
+            </a:r>
+          </a:p>
+          <a:p>
+            <a:r>
+              <a:t>LECTURER CUE</a:t>
+            </a:r>
+          </a:p>
+          <a:p>
+            <a:r>
+              <a:t>Revenue by channel, by segment and by month, delivered orders only. Then export the order lines to CSV, build the same three figures as pivot tables, and confirm they agree. Where they disagree, the SQL is usually right and the pivot has quietly included something.</a:t>
+            </a:r>
+          </a:p>
+          <a:p>
+            <a:r>
+              <a:t/>
+            </a:r>
+          </a:p>
+          <a:p>
+            <a:r>
+              <a:t>EXPLAIN IN ORDINARY WORDS</a:t>
+            </a:r>
+          </a:p>
+          <a:p>
+            <a:r>
+              <a:t>A CSV is a text table. The header supplies column names. With csv.DictReader, values start as text, even if they look like numbers. A path tells Python where the file is.</a:t>
+            </a:r>
+          </a:p>
+          <a:p>
+            <a:r>
+              <a:t/>
+            </a:r>
+          </a:p>
+          <a:p>
+            <a:r>
+              <a:t>CHECK AND EXPECTED ANSWER</a:t>
+            </a:r>
+          </a:p>
+          <a:p>
+            <a:r>
+              <a:t>Can "2.5" from csv.DictReader be added as a number without conversion? No; convert valid numeric text first.</a:t>
+            </a:r>
+          </a:p>
+          <a:p>
+            <a:r>
+              <a:t/>
+            </a:r>
+          </a:p>
+          <a:p>
+            <a:r>
+              <a:t>IF LEARNERS ARE STUCK</a:t>
+            </a:r>
+          </a:p>
+          <a:p>
+            <a:r>
+              <a:t>Show the file in the runtime folder and compare its exact filename, case and column headers. Upload data again after a fresh Colab runtime.</a:t>
+            </a:r>
+          </a:p>
+          <a:p>
+            <a:r>
+              <a:t/>
+            </a:r>
+          </a:p>
+          <a:p>
+            <a:r>
+              <a:t>NEXT</a:t>
+            </a:r>
+          </a:p>
+          <a:p>
+            <a:r>
+              <a:t>What you can do now. Move on after a learner can explain the current example or required action.</a:t>
             </a:r>
           </a:p>
         </p:txBody>
@@ -1295,8 +2214,8 @@
 </p:notes>
 </file>
 
-<file path=ppt/notesSlides/notesSlide20.xml><?xml version="1.0" encoding="utf-8"?>
-<p:notes xmlns:a="http://schemas.openxmlformats.org/drawingml/2006/main" xmlns:p="http://schemas.openxmlformats.org/presentationml/2006/main" xmlns:r="http://schemas.openxmlformats.org/officeDocument/2006/relationships">
+<file path=ppt/notesSlides/notesSlide19.xml><?xml version="1.0" encoding="utf-8"?>
+<p:notes xmlns:a="http://schemas.openxmlformats.org/drawingml/2006/main" xmlns:p="http://schemas.openxmlformats.org/presentationml/2006/main">
   <p:cSld>
     <p:spTree>
       <p:nvGrpSpPr>
@@ -1340,7 +2259,87 @@
           <a:lstStyle/>
           <a:p>
             <a:r>
-              <a:t>Two more groupings on the sheet, then one sentence: which grouping of your own work data would you most like to see, and which columns would it need?</a:t>
+              <a:t>TEACHING PURPOSE</a:t>
+            </a:r>
+          </a:p>
+          <a:p>
+            <a:r>
+              <a:t>What you can do now</a:t>
+            </a:r>
+          </a:p>
+          <a:p>
+            <a:r>
+              <a:t/>
+            </a:r>
+          </a:p>
+          <a:p>
+            <a:r>
+              <a:t>CONNECT</a:t>
+            </a:r>
+          </a:p>
+          <a:p>
+            <a:r>
+              <a:t>Build on the preceding slide: Three groupings, then check them in Excel.</a:t>
+            </a:r>
+          </a:p>
+          <a:p>
+            <a:r>
+              <a:t/>
+            </a:r>
+          </a:p>
+          <a:p>
+            <a:r>
+              <a:t>EXPLAIN IN ORDINARY WORDS</a:t>
+            </a:r>
+          </a:p>
+          <a:p>
+            <a:r>
+              <a:t>Grouping puts rows sharing a key into buckets, then computes a result for each bucket. WHERE filters rows before SQL grouping; HAVING filters grouped results.</a:t>
+            </a:r>
+          </a:p>
+          <a:p>
+            <a:r>
+              <a:t/>
+            </a:r>
+          </a:p>
+          <a:p>
+            <a:r>
+              <a:t>CHECK AND EXPECTED ANSWER</a:t>
+            </a:r>
+          </a:p>
+          <a:p>
+            <a:r>
+              <a:t>Which condition keeps only groups with more than five rows? HAVING COUNT(*) &gt; 5.</a:t>
+            </a:r>
+          </a:p>
+          <a:p>
+            <a:r>
+              <a:t/>
+            </a:r>
+          </a:p>
+          <a:p>
+            <a:r>
+              <a:t>IF LEARNERS ARE STUCK</a:t>
+            </a:r>
+          </a:p>
+          <a:p>
+            <a:r>
+              <a:t>Draw two buckets and count by hand. Name the intended output grain before writing the aggregation.</a:t>
+            </a:r>
+          </a:p>
+          <a:p>
+            <a:r>
+              <a:t/>
+            </a:r>
+          </a:p>
+          <a:p>
+            <a:r>
+              <a:t>NEXT</a:t>
+            </a:r>
+          </a:p>
+          <a:p>
+            <a:r>
+              <a:t>Before the next session. Move on after a learner can explain the current example or required action.</a:t>
             </a:r>
           </a:p>
         </p:txBody>
@@ -1365,8 +2364,8 @@
 </p:notes>
 </file>
 
-<file path=ppt/notesSlides/notesSlide21.xml><?xml version="1.0" encoding="utf-8"?>
-<p:notes xmlns:a="http://schemas.openxmlformats.org/drawingml/2006/main" xmlns:p="http://schemas.openxmlformats.org/presentationml/2006/main" xmlns:r="http://schemas.openxmlformats.org/officeDocument/2006/relationships">
+<file path=ppt/notesSlides/notesSlide2.xml><?xml version="1.0" encoding="utf-8"?>
+<p:notes xmlns:a="http://schemas.openxmlformats.org/drawingml/2006/main" xmlns:p="http://schemas.openxmlformats.org/presentationml/2006/main">
   <p:cSld>
     <p:spTree>
       <p:nvGrpSpPr>
@@ -1410,7 +2409,102 @@
           <a:lstStyle/>
           <a:p>
             <a:r>
-              <a:t>It now runs again next month without you, on a file too big for a spreadsheet, and somebody else can read what you did. That is the whole argument for SQL and you have just made it yourself.</a:t>
+              <a:t>TEACHING PURPOSE</a:t>
+            </a:r>
+          </a:p>
+          <a:p>
+            <a:r>
+              <a:t>Where tonight sits</a:t>
+            </a:r>
+          </a:p>
+          <a:p>
+            <a:r>
+              <a:t/>
+            </a:r>
+          </a:p>
+          <a:p>
+            <a:r>
+              <a:t>CONNECT</a:t>
+            </a:r>
+          </a:p>
+          <a:p>
+            <a:r>
+              <a:t>Build on the preceding slide: Counting and grouping.</a:t>
+            </a:r>
+          </a:p>
+          <a:p>
+            <a:r>
+              <a:t/>
+            </a:r>
+          </a:p>
+          <a:p>
+            <a:r>
+              <a:t>LECTURER CUE</a:t>
+            </a:r>
+          </a:p>
+          <a:p>
+            <a:r>
+              <a:t>Tonight is session 4 of fifteen.</a:t>
+            </a:r>
+          </a:p>
+          <a:p>
+            <a:r>
+              <a:t/>
+            </a:r>
+          </a:p>
+          <a:p>
+            <a:r>
+              <a:t>EXPLAIN IN ORDINARY WORDS</a:t>
+            </a:r>
+          </a:p>
+          <a:p>
+            <a:r>
+              <a:t>Grain means what one row represents. A key identifies a row; a primary key may use more than one column. A join matches keys, and multiple matches can multiply rows.</a:t>
+            </a:r>
+          </a:p>
+          <a:p>
+            <a:r>
+              <a:t/>
+            </a:r>
+          </a:p>
+          <a:p>
+            <a:r>
+              <a:t>CHECK AND EXPECTED ANSWER</a:t>
+            </a:r>
+          </a:p>
+          <a:p>
+            <a:r>
+              <a:t>One order has two lines. After joining orders to lines, how many rows for it? Two. Summing a repeated order-level total would double-count.</a:t>
+            </a:r>
+          </a:p>
+          <a:p>
+            <a:r>
+              <a:t/>
+            </a:r>
+          </a:p>
+          <a:p>
+            <a:r>
+              <a:t>IF LEARNERS ARE STUCK</a:t>
+            </a:r>
+          </a:p>
+          <a:p>
+            <a:r>
+              <a:t>Write one example row from each table. Circle keys and trace each match. Aggregate to the intended grain and check counts and totals.</a:t>
+            </a:r>
+          </a:p>
+          <a:p>
+            <a:r>
+              <a:t/>
+            </a:r>
+          </a:p>
+          <a:p>
+            <a:r>
+              <a:t>NEXT</a:t>
+            </a:r>
+          </a:p>
+          <a:p>
+            <a:r>
+              <a:t>The words for tonight. Move on after a learner can explain the current example or required action.</a:t>
             </a:r>
           </a:p>
         </p:txBody>
@@ -1435,8 +2529,8 @@
 </p:notes>
 </file>
 
-<file path=ppt/notesSlides/notesSlide3.xml><?xml version="1.0" encoding="utf-8"?>
-<p:notes xmlns:a="http://schemas.openxmlformats.org/drawingml/2006/main" xmlns:p="http://schemas.openxmlformats.org/presentationml/2006/main" xmlns:r="http://schemas.openxmlformats.org/officeDocument/2006/relationships">
+<file path=ppt/notesSlides/notesSlide20.xml><?xml version="1.0" encoding="utf-8"?>
+<p:notes xmlns:a="http://schemas.openxmlformats.org/drawingml/2006/main" xmlns:p="http://schemas.openxmlformats.org/presentationml/2006/main">
   <p:cSld>
     <p:spTree>
       <p:nvGrpSpPr>
@@ -1478,7 +2572,61 @@
         <p:txBody>
           <a:bodyPr/>
           <a:lstStyle/>
-          <a:p/>
+          <a:p>
+            <a:r>
+              <a:t>TEACHING PURPOSE</a:t>
+            </a:r>
+          </a:p>
+          <a:p>
+            <a:r>
+              <a:t>Before the next session</a:t>
+            </a:r>
+          </a:p>
+          <a:p>
+            <a:r>
+              <a:t/>
+            </a:r>
+          </a:p>
+          <a:p>
+            <a:r>
+              <a:t>CONNECT</a:t>
+            </a:r>
+          </a:p>
+          <a:p>
+            <a:r>
+              <a:t>Build on the preceding slide: What you can do now.</a:t>
+            </a:r>
+          </a:p>
+          <a:p>
+            <a:r>
+              <a:t/>
+            </a:r>
+          </a:p>
+          <a:p>
+            <a:r>
+              <a:t>LECTURER CUE</a:t>
+            </a:r>
+          </a:p>
+          <a:p>
+            <a:r>
+              <a:t>Two more groupings on the sheet, then one sentence: which grouping of your own work data would you most like to see, and which columns would it need?</a:t>
+            </a:r>
+          </a:p>
+          <a:p>
+            <a:r>
+              <a:t/>
+            </a:r>
+          </a:p>
+          <a:p>
+            <a:r>
+              <a:t>NEXT</a:t>
+            </a:r>
+          </a:p>
+          <a:p>
+            <a:r>
+              <a:t>You have written your first pivot table down. Move on after a learner can explain the current example or required action.</a:t>
+            </a:r>
+          </a:p>
         </p:txBody>
       </p:sp>
       <p:sp>
@@ -1501,8 +2649,8 @@
 </p:notes>
 </file>
 
-<file path=ppt/notesSlides/notesSlide4.xml><?xml version="1.0" encoding="utf-8"?>
-<p:notes xmlns:a="http://schemas.openxmlformats.org/drawingml/2006/main" xmlns:p="http://schemas.openxmlformats.org/presentationml/2006/main" xmlns:r="http://schemas.openxmlformats.org/officeDocument/2006/relationships">
+<file path=ppt/notesSlides/notesSlide21.xml><?xml version="1.0" encoding="utf-8"?>
+<p:notes xmlns:a="http://schemas.openxmlformats.org/drawingml/2006/main" xmlns:p="http://schemas.openxmlformats.org/presentationml/2006/main">
   <p:cSld>
     <p:spTree>
       <p:nvGrpSpPr>
@@ -1546,7 +2694,87 @@
           <a:lstStyle/>
           <a:p>
             <a:r>
-              <a:t>These three are what tonight is marked against, in the sense that the lab checks them.</a:t>
+              <a:t>TEACHING PURPOSE</a:t>
+            </a:r>
+          </a:p>
+          <a:p>
+            <a:r>
+              <a:t>You have written your first pivot table down</a:t>
+            </a:r>
+          </a:p>
+          <a:p>
+            <a:r>
+              <a:t/>
+            </a:r>
+          </a:p>
+          <a:p>
+            <a:r>
+              <a:t>CONNECT</a:t>
+            </a:r>
+          </a:p>
+          <a:p>
+            <a:r>
+              <a:t>Build on the preceding slide: Before the next session.</a:t>
+            </a:r>
+          </a:p>
+          <a:p>
+            <a:r>
+              <a:t/>
+            </a:r>
+          </a:p>
+          <a:p>
+            <a:r>
+              <a:t>LECTURER CUE</a:t>
+            </a:r>
+          </a:p>
+          <a:p>
+            <a:r>
+              <a:t>It now runs again next month without you, on a file too big for a spreadsheet, and somebody else can read what you did. That is the whole argument for SQL and you have just made it yourself.</a:t>
+            </a:r>
+          </a:p>
+          <a:p>
+            <a:r>
+              <a:t/>
+            </a:r>
+          </a:p>
+          <a:p>
+            <a:r>
+              <a:t>EXPLAIN IN ORDINARY WORDS</a:t>
+            </a:r>
+          </a:p>
+          <a:p>
+            <a:r>
+              <a:t>Grain means what one row represents. A key identifies a row; a primary key may use more than one column. A join matches keys, and multiple matches can multiply rows.</a:t>
+            </a:r>
+          </a:p>
+          <a:p>
+            <a:r>
+              <a:t/>
+            </a:r>
+          </a:p>
+          <a:p>
+            <a:r>
+              <a:t>CHECK AND EXPECTED ANSWER</a:t>
+            </a:r>
+          </a:p>
+          <a:p>
+            <a:r>
+              <a:t>One order has two lines. After joining orders to lines, how many rows for it? Two. Summing a repeated order-level total would double-count.</a:t>
+            </a:r>
+          </a:p>
+          <a:p>
+            <a:r>
+              <a:t/>
+            </a:r>
+          </a:p>
+          <a:p>
+            <a:r>
+              <a:t>IF LEARNERS ARE STUCK</a:t>
+            </a:r>
+          </a:p>
+          <a:p>
+            <a:r>
+              <a:t>Write one example row from each table. Circle keys and trace each match. Aggregate to the intended grain and check counts and totals.</a:t>
             </a:r>
           </a:p>
         </p:txBody>
@@ -1571,8 +2799,8 @@
 </p:notes>
 </file>
 
-<file path=ppt/notesSlides/notesSlide5.xml><?xml version="1.0" encoding="utf-8"?>
-<p:notes xmlns:a="http://schemas.openxmlformats.org/drawingml/2006/main" xmlns:p="http://schemas.openxmlformats.org/presentationml/2006/main" xmlns:r="http://schemas.openxmlformats.org/officeDocument/2006/relationships">
+<file path=ppt/notesSlides/notesSlide3.xml><?xml version="1.0" encoding="utf-8"?>
+<p:notes xmlns:a="http://schemas.openxmlformats.org/drawingml/2006/main" xmlns:p="http://schemas.openxmlformats.org/presentationml/2006/main">
   <p:cSld>
     <p:spTree>
       <p:nvGrpSpPr>
@@ -1616,7 +2844,87 @@
           <a:lstStyle/>
           <a:p>
             <a:r>
-              <a:t>It runs again next month without you, somebody else can check it, and it works on files a spreadsheet will not open.</a:t>
+              <a:t>TEACHING PURPOSE</a:t>
+            </a:r>
+          </a:p>
+          <a:p>
+            <a:r>
+              <a:t>The words for tonight</a:t>
+            </a:r>
+          </a:p>
+          <a:p>
+            <a:r>
+              <a:t/>
+            </a:r>
+          </a:p>
+          <a:p>
+            <a:r>
+              <a:t>CONNECT</a:t>
+            </a:r>
+          </a:p>
+          <a:p>
+            <a:r>
+              <a:t>Build on the preceding slide: Where tonight sits.</a:t>
+            </a:r>
+          </a:p>
+          <a:p>
+            <a:r>
+              <a:t/>
+            </a:r>
+          </a:p>
+          <a:p>
+            <a:r>
+              <a:t>EXPLAIN IN ORDINARY WORDS</a:t>
+            </a:r>
+          </a:p>
+          <a:p>
+            <a:r>
+              <a:t>Grouping puts rows sharing a key into buckets, then computes a result for each bucket. WHERE filters rows before SQL grouping; HAVING filters grouped results.</a:t>
+            </a:r>
+          </a:p>
+          <a:p>
+            <a:r>
+              <a:t/>
+            </a:r>
+          </a:p>
+          <a:p>
+            <a:r>
+              <a:t>CHECK AND EXPECTED ANSWER</a:t>
+            </a:r>
+          </a:p>
+          <a:p>
+            <a:r>
+              <a:t>Which condition keeps only groups with more than five rows? HAVING COUNT(*) &gt; 5.</a:t>
+            </a:r>
+          </a:p>
+          <a:p>
+            <a:r>
+              <a:t/>
+            </a:r>
+          </a:p>
+          <a:p>
+            <a:r>
+              <a:t>IF LEARNERS ARE STUCK</a:t>
+            </a:r>
+          </a:p>
+          <a:p>
+            <a:r>
+              <a:t>Draw two buckets and count by hand. Name the intended output grain before writing the aggregation.</a:t>
+            </a:r>
+          </a:p>
+          <a:p>
+            <a:r>
+              <a:t/>
+            </a:r>
+          </a:p>
+          <a:p>
+            <a:r>
+              <a:t>NEXT</a:t>
+            </a:r>
+          </a:p>
+          <a:p>
+            <a:r>
+              <a:t>By the end of tonight you can…. Move on after a learner can explain the current example or required action.</a:t>
             </a:r>
           </a:p>
         </p:txBody>
@@ -1641,8 +2949,8 @@
 </p:notes>
 </file>
 
-<file path=ppt/notesSlides/notesSlide6.xml><?xml version="1.0" encoding="utf-8"?>
-<p:notes xmlns:a="http://schemas.openxmlformats.org/drawingml/2006/main" xmlns:p="http://schemas.openxmlformats.org/presentationml/2006/main" xmlns:r="http://schemas.openxmlformats.org/officeDocument/2006/relationships">
+<file path=ppt/notesSlides/notesSlide4.xml><?xml version="1.0" encoding="utf-8"?>
+<p:notes xmlns:a="http://schemas.openxmlformats.org/drawingml/2006/main" xmlns:p="http://schemas.openxmlformats.org/presentationml/2006/main">
   <p:cSld>
     <p:spTree>
       <p:nvGrpSpPr>
@@ -1686,7 +2994,102 @@
           <a:lstStyle/>
           <a:p>
             <a:r>
-              <a:t>A calculation that collapses many rows into one number: count, sum, average, minimum, maximum.</a:t>
+              <a:t>TEACHING PURPOSE</a:t>
+            </a:r>
+          </a:p>
+          <a:p>
+            <a:r>
+              <a:t>By the end of tonight you can…</a:t>
+            </a:r>
+          </a:p>
+          <a:p>
+            <a:r>
+              <a:t/>
+            </a:r>
+          </a:p>
+          <a:p>
+            <a:r>
+              <a:t>CONNECT</a:t>
+            </a:r>
+          </a:p>
+          <a:p>
+            <a:r>
+              <a:t>Build on the preceding slide: The words for tonight.</a:t>
+            </a:r>
+          </a:p>
+          <a:p>
+            <a:r>
+              <a:t/>
+            </a:r>
+          </a:p>
+          <a:p>
+            <a:r>
+              <a:t>LECTURER CUE</a:t>
+            </a:r>
+          </a:p>
+          <a:p>
+            <a:r>
+              <a:t>These three are what tonight is marked against, in the sense that the lab checks them.</a:t>
+            </a:r>
+          </a:p>
+          <a:p>
+            <a:r>
+              <a:t/>
+            </a:r>
+          </a:p>
+          <a:p>
+            <a:r>
+              <a:t>EXPLAIN IN ORDINARY WORDS</a:t>
+            </a:r>
+          </a:p>
+          <a:p>
+            <a:r>
+              <a:t>Grouping puts rows sharing a key into buckets, then computes a result for each bucket. WHERE filters rows before SQL grouping; HAVING filters grouped results.</a:t>
+            </a:r>
+          </a:p>
+          <a:p>
+            <a:r>
+              <a:t/>
+            </a:r>
+          </a:p>
+          <a:p>
+            <a:r>
+              <a:t>CHECK AND EXPECTED ANSWER</a:t>
+            </a:r>
+          </a:p>
+          <a:p>
+            <a:r>
+              <a:t>Which condition keeps only groups with more than five rows? HAVING COUNT(*) &gt; 5.</a:t>
+            </a:r>
+          </a:p>
+          <a:p>
+            <a:r>
+              <a:t/>
+            </a:r>
+          </a:p>
+          <a:p>
+            <a:r>
+              <a:t>IF LEARNERS ARE STUCK</a:t>
+            </a:r>
+          </a:p>
+          <a:p>
+            <a:r>
+              <a:t>Draw two buckets and count by hand. Name the intended output grain before writing the aggregation.</a:t>
+            </a:r>
+          </a:p>
+          <a:p>
+            <a:r>
+              <a:t/>
+            </a:r>
+          </a:p>
+          <a:p>
+            <a:r>
+              <a:t>NEXT</a:t>
+            </a:r>
+          </a:p>
+          <a:p>
+            <a:r>
+              <a:t>You can already build a pivot table.. Move on after a learner can explain the current example or required action.</a:t>
             </a:r>
           </a:p>
         </p:txBody>
@@ -1711,8 +3114,8 @@
 </p:notes>
 </file>
 
-<file path=ppt/notesSlides/notesSlide7.xml><?xml version="1.0" encoding="utf-8"?>
-<p:notes xmlns:a="http://schemas.openxmlformats.org/drawingml/2006/main" xmlns:p="http://schemas.openxmlformats.org/presentationml/2006/main" xmlns:r="http://schemas.openxmlformats.org/officeDocument/2006/relationships">
+<file path=ppt/notesSlides/notesSlide5.xml><?xml version="1.0" encoding="utf-8"?>
+<p:notes xmlns:a="http://schemas.openxmlformats.org/drawingml/2006/main" xmlns:p="http://schemas.openxmlformats.org/presentationml/2006/main">
   <p:cSld>
     <p:spTree>
       <p:nvGrpSpPr>
@@ -1756,7 +3159,102 @@
           <a:lstStyle/>
           <a:p>
             <a:r>
-              <a:t>Says which rows belong together before the aggregate runs. Group by region and you get one number per region.</a:t>
+              <a:t>TEACHING PURPOSE</a:t>
+            </a:r>
+          </a:p>
+          <a:p>
+            <a:r>
+              <a:t>You can already build a pivot table.</a:t>
+            </a:r>
+          </a:p>
+          <a:p>
+            <a:r>
+              <a:t/>
+            </a:r>
+          </a:p>
+          <a:p>
+            <a:r>
+              <a:t>CONNECT</a:t>
+            </a:r>
+          </a:p>
+          <a:p>
+            <a:r>
+              <a:t>Build on the preceding slide: By the end of tonight you can….</a:t>
+            </a:r>
+          </a:p>
+          <a:p>
+            <a:r>
+              <a:t/>
+            </a:r>
+          </a:p>
+          <a:p>
+            <a:r>
+              <a:t>LECTURER CUE</a:t>
+            </a:r>
+          </a:p>
+          <a:p>
+            <a:r>
+              <a:t>It runs again next month without you, somebody else can check it, and it works on files a spreadsheet will not open.</a:t>
+            </a:r>
+          </a:p>
+          <a:p>
+            <a:r>
+              <a:t/>
+            </a:r>
+          </a:p>
+          <a:p>
+            <a:r>
+              <a:t>EXPLAIN IN ORDINARY WORDS</a:t>
+            </a:r>
+          </a:p>
+          <a:p>
+            <a:r>
+              <a:t>An observation describes the data. A finding answers a defined question with evidence. A recommendation adds an action, its justification and limits.</a:t>
+            </a:r>
+          </a:p>
+          <a:p>
+            <a:r>
+              <a:t/>
+            </a:r>
+          </a:p>
+          <a:p>
+            <a:r>
+              <a:t>CHECK AND EXPECTED ANSWER</a:t>
+            </a:r>
+          </a:p>
+          <a:p>
+            <a:r>
+              <a:t>Does a difference between two groups prove one caused the other? No. Other differences or selection may explain it.</a:t>
+            </a:r>
+          </a:p>
+          <a:p>
+            <a:r>
+              <a:t/>
+            </a:r>
+          </a:p>
+          <a:p>
+            <a:r>
+              <a:t>IF LEARNERS ARE STUCK</a:t>
+            </a:r>
+          </a:p>
+          <a:p>
+            <a:r>
+              <a:t>Ask for the population, time period, number and comparison. Then ask what additional evidence could change the recommendation.</a:t>
+            </a:r>
+          </a:p>
+          <a:p>
+            <a:r>
+              <a:t/>
+            </a:r>
+          </a:p>
+          <a:p>
+            <a:r>
+              <a:t>NEXT</a:t>
+            </a:r>
+          </a:p>
+          <a:p>
+            <a:r>
+              <a:t>Your pivot table, written down. Move on after a learner can explain the current example or required action.</a:t>
             </a:r>
           </a:p>
         </p:txBody>
@@ -1781,8 +3279,8 @@
 </p:notes>
 </file>
 
-<file path=ppt/notesSlides/notesSlide8.xml><?xml version="1.0" encoding="utf-8"?>
-<p:notes xmlns:a="http://schemas.openxmlformats.org/drawingml/2006/main" xmlns:p="http://schemas.openxmlformats.org/presentationml/2006/main" xmlns:r="http://schemas.openxmlformats.org/officeDocument/2006/relationships">
+<file path=ppt/notesSlides/notesSlide6.xml><?xml version="1.0" encoding="utf-8"?>
+<p:notes xmlns:a="http://schemas.openxmlformats.org/drawingml/2006/main" xmlns:p="http://schemas.openxmlformats.org/presentationml/2006/main">
   <p:cSld>
     <p:spTree>
       <p:nvGrpSpPr>
@@ -1826,7 +3324,57 @@
           <a:lstStyle/>
           <a:p>
             <a:r>
-              <a:t>A filter on the GROUPS, applied after the aggregation. WHERE filters rows before grouping; HAVING filters the results afterwards.</a:t>
+              <a:t>TEACHING PURPOSE</a:t>
+            </a:r>
+          </a:p>
+          <a:p>
+            <a:r>
+              <a:t>Aggregate</a:t>
+            </a:r>
+          </a:p>
+          <a:p>
+            <a:r>
+              <a:t/>
+            </a:r>
+          </a:p>
+          <a:p>
+            <a:r>
+              <a:t>CONNECT</a:t>
+            </a:r>
+          </a:p>
+          <a:p>
+            <a:r>
+              <a:t>Build on the preceding slide: Your pivot table, written down.</a:t>
+            </a:r>
+          </a:p>
+          <a:p>
+            <a:r>
+              <a:t/>
+            </a:r>
+          </a:p>
+          <a:p>
+            <a:r>
+              <a:t>LECTURER CUE</a:t>
+            </a:r>
+          </a:p>
+          <a:p>
+            <a:r>
+              <a:t>A calculation that collapses many rows into one number: count, sum, average, minimum, maximum.</a:t>
+            </a:r>
+          </a:p>
+          <a:p>
+            <a:r>
+              <a:t/>
+            </a:r>
+          </a:p>
+          <a:p>
+            <a:r>
+              <a:t>NEXT</a:t>
+            </a:r>
+          </a:p>
+          <a:p>
+            <a:r>
+              <a:t>GROUP BY. Move on after a learner can explain the current example or required action.</a:t>
             </a:r>
           </a:p>
         </p:txBody>
@@ -1851,8 +3399,8 @@
 </p:notes>
 </file>
 
-<file path=ppt/notesSlides/notesSlide9.xml><?xml version="1.0" encoding="utf-8"?>
-<p:notes xmlns:a="http://schemas.openxmlformats.org/drawingml/2006/main" xmlns:p="http://schemas.openxmlformats.org/presentationml/2006/main" xmlns:r="http://schemas.openxmlformats.org/officeDocument/2006/relationships">
+<file path=ppt/notesSlides/notesSlide7.xml><?xml version="1.0" encoding="utf-8"?>
+<p:notes xmlns:a="http://schemas.openxmlformats.org/drawingml/2006/main" xmlns:p="http://schemas.openxmlformats.org/presentationml/2006/main">
   <p:cSld>
     <p:spTree>
       <p:nvGrpSpPr>
@@ -1896,7 +3444,432 @@
           <a:lstStyle/>
           <a:p>
             <a:r>
+              <a:t>TEACHING PURPOSE</a:t>
+            </a:r>
+          </a:p>
+          <a:p>
+            <a:r>
+              <a:t>GROUP BY</a:t>
+            </a:r>
+          </a:p>
+          <a:p>
+            <a:r>
+              <a:t/>
+            </a:r>
+          </a:p>
+          <a:p>
+            <a:r>
+              <a:t>CONNECT</a:t>
+            </a:r>
+          </a:p>
+          <a:p>
+            <a:r>
+              <a:t>Build on the preceding slide: Aggregate.</a:t>
+            </a:r>
+          </a:p>
+          <a:p>
+            <a:r>
+              <a:t/>
+            </a:r>
+          </a:p>
+          <a:p>
+            <a:r>
+              <a:t>LECTURER CUE</a:t>
+            </a:r>
+          </a:p>
+          <a:p>
+            <a:r>
+              <a:t>Says which rows belong together before the aggregate runs. Group by region and you get one number per region.</a:t>
+            </a:r>
+          </a:p>
+          <a:p>
+            <a:r>
+              <a:t/>
+            </a:r>
+          </a:p>
+          <a:p>
+            <a:r>
+              <a:t>EXPLAIN IN ORDINARY WORDS</a:t>
+            </a:r>
+          </a:p>
+          <a:p>
+            <a:r>
+              <a:t>Grouping puts rows sharing a key into buckets, then computes a result for each bucket. WHERE filters rows before SQL grouping; HAVING filters grouped results.</a:t>
+            </a:r>
+          </a:p>
+          <a:p>
+            <a:r>
+              <a:t/>
+            </a:r>
+          </a:p>
+          <a:p>
+            <a:r>
+              <a:t>CHECK AND EXPECTED ANSWER</a:t>
+            </a:r>
+          </a:p>
+          <a:p>
+            <a:r>
+              <a:t>Which condition keeps only groups with more than five rows? HAVING COUNT(*) &gt; 5.</a:t>
+            </a:r>
+          </a:p>
+          <a:p>
+            <a:r>
+              <a:t/>
+            </a:r>
+          </a:p>
+          <a:p>
+            <a:r>
+              <a:t>IF LEARNERS ARE STUCK</a:t>
+            </a:r>
+          </a:p>
+          <a:p>
+            <a:r>
+              <a:t>Draw two buckets and count by hand. Name the intended output grain before writing the aggregation.</a:t>
+            </a:r>
+          </a:p>
+          <a:p>
+            <a:r>
+              <a:t/>
+            </a:r>
+          </a:p>
+          <a:p>
+            <a:r>
+              <a:t>NEXT</a:t>
+            </a:r>
+          </a:p>
+          <a:p>
+            <a:r>
+              <a:t>HAVING. Move on after a learner can explain the current example or required action.</a:t>
+            </a:r>
+          </a:p>
+        </p:txBody>
+      </p:sp>
+      <p:sp>
+        <p:nvSpPr>
+          <p:cNvPr id="4" name="Slide Number Placeholder 3"/>
+          <p:cNvSpPr>
+            <a:spLocks noGrp="1"/>
+          </p:cNvSpPr>
+          <p:nvPr>
+            <p:ph type="sldNum" idx="5" sz="quarter"/>
+          </p:nvPr>
+        </p:nvSpPr>
+        <p:spPr/>
+      </p:sp>
+    </p:spTree>
+  </p:cSld>
+  <p:clrMapOvr>
+    <a:masterClrMapping/>
+  </p:clrMapOvr>
+</p:notes>
+</file>
+
+<file path=ppt/notesSlides/notesSlide8.xml><?xml version="1.0" encoding="utf-8"?>
+<p:notes xmlns:a="http://schemas.openxmlformats.org/drawingml/2006/main" xmlns:p="http://schemas.openxmlformats.org/presentationml/2006/main">
+  <p:cSld>
+    <p:spTree>
+      <p:nvGrpSpPr>
+        <p:cNvPr id="1" name=""/>
+        <p:cNvGrpSpPr/>
+        <p:nvPr/>
+      </p:nvGrpSpPr>
+      <p:grpSpPr>
+        <a:xfrm>
+          <a:off x="0" y="0"/>
+          <a:ext cx="0" cy="0"/>
+          <a:chOff x="0" y="0"/>
+          <a:chExt cx="0" cy="0"/>
+        </a:xfrm>
+      </p:grpSpPr>
+      <p:sp>
+        <p:nvSpPr>
+          <p:cNvPr id="2" name="Slide Image Placeholder 1"/>
+          <p:cNvSpPr>
+            <a:spLocks noGrp="1"/>
+          </p:cNvSpPr>
+          <p:nvPr>
+            <p:ph type="sldImg" idx="2"/>
+          </p:nvPr>
+        </p:nvSpPr>
+        <p:spPr/>
+      </p:sp>
+      <p:sp>
+        <p:nvSpPr>
+          <p:cNvPr id="3" name="Notes Placeholder 2"/>
+          <p:cNvSpPr>
+            <a:spLocks noGrp="1"/>
+          </p:cNvSpPr>
+          <p:nvPr>
+            <p:ph type="body" idx="3" sz="quarter"/>
+          </p:nvPr>
+        </p:nvSpPr>
+        <p:spPr/>
+        <p:txBody>
+          <a:bodyPr/>
+          <a:lstStyle/>
+          <a:p>
+            <a:r>
+              <a:t>TEACHING PURPOSE</a:t>
+            </a:r>
+          </a:p>
+          <a:p>
+            <a:r>
+              <a:t>HAVING</a:t>
+            </a:r>
+          </a:p>
+          <a:p>
+            <a:r>
+              <a:t/>
+            </a:r>
+          </a:p>
+          <a:p>
+            <a:r>
+              <a:t>CONNECT</a:t>
+            </a:r>
+          </a:p>
+          <a:p>
+            <a:r>
+              <a:t>Build on the preceding slide: GROUP BY.</a:t>
+            </a:r>
+          </a:p>
+          <a:p>
+            <a:r>
+              <a:t/>
+            </a:r>
+          </a:p>
+          <a:p>
+            <a:r>
+              <a:t>LECTURER CUE</a:t>
+            </a:r>
+          </a:p>
+          <a:p>
+            <a:r>
+              <a:t>A filter on the GROUPS, applied after the aggregation. WHERE filters rows before grouping; HAVING filters the results afterwards.</a:t>
+            </a:r>
+          </a:p>
+          <a:p>
+            <a:r>
+              <a:t/>
+            </a:r>
+          </a:p>
+          <a:p>
+            <a:r>
+              <a:t>EXPLAIN IN ORDINARY WORDS</a:t>
+            </a:r>
+          </a:p>
+          <a:p>
+            <a:r>
+              <a:t>Grouping puts rows sharing a key into buckets, then computes a result for each bucket. WHERE filters rows before SQL grouping; HAVING filters grouped results.</a:t>
+            </a:r>
+          </a:p>
+          <a:p>
+            <a:r>
+              <a:t/>
+            </a:r>
+          </a:p>
+          <a:p>
+            <a:r>
+              <a:t>CHECK AND EXPECTED ANSWER</a:t>
+            </a:r>
+          </a:p>
+          <a:p>
+            <a:r>
+              <a:t>Which condition keeps only groups with more than five rows? HAVING COUNT(*) &gt; 5.</a:t>
+            </a:r>
+          </a:p>
+          <a:p>
+            <a:r>
+              <a:t/>
+            </a:r>
+          </a:p>
+          <a:p>
+            <a:r>
+              <a:t>IF LEARNERS ARE STUCK</a:t>
+            </a:r>
+          </a:p>
+          <a:p>
+            <a:r>
+              <a:t>Draw two buckets and count by hand. Name the intended output grain before writing the aggregation.</a:t>
+            </a:r>
+          </a:p>
+          <a:p>
+            <a:r>
+              <a:t/>
+            </a:r>
+          </a:p>
+          <a:p>
+            <a:r>
+              <a:t>NEXT</a:t>
+            </a:r>
+          </a:p>
+          <a:p>
+            <a:r>
+              <a:t>Derived value. Move on after a learner can explain the current example or required action.</a:t>
+            </a:r>
+          </a:p>
+        </p:txBody>
+      </p:sp>
+      <p:sp>
+        <p:nvSpPr>
+          <p:cNvPr id="4" name="Slide Number Placeholder 3"/>
+          <p:cNvSpPr>
+            <a:spLocks noGrp="1"/>
+          </p:cNvSpPr>
+          <p:nvPr>
+            <p:ph type="sldNum" idx="5" sz="quarter"/>
+          </p:nvPr>
+        </p:nvSpPr>
+        <p:spPr/>
+      </p:sp>
+    </p:spTree>
+  </p:cSld>
+  <p:clrMapOvr>
+    <a:masterClrMapping/>
+  </p:clrMapOvr>
+</p:notes>
+</file>
+
+<file path=ppt/notesSlides/notesSlide9.xml><?xml version="1.0" encoding="utf-8"?>
+<p:notes xmlns:a="http://schemas.openxmlformats.org/drawingml/2006/main" xmlns:p="http://schemas.openxmlformats.org/presentationml/2006/main">
+  <p:cSld>
+    <p:spTree>
+      <p:nvGrpSpPr>
+        <p:cNvPr id="1" name=""/>
+        <p:cNvGrpSpPr/>
+        <p:nvPr/>
+      </p:nvGrpSpPr>
+      <p:grpSpPr>
+        <a:xfrm>
+          <a:off x="0" y="0"/>
+          <a:ext cx="0" cy="0"/>
+          <a:chOff x="0" y="0"/>
+          <a:chExt cx="0" cy="0"/>
+        </a:xfrm>
+      </p:grpSpPr>
+      <p:sp>
+        <p:nvSpPr>
+          <p:cNvPr id="2" name="Slide Image Placeholder 1"/>
+          <p:cNvSpPr>
+            <a:spLocks noGrp="1"/>
+          </p:cNvSpPr>
+          <p:nvPr>
+            <p:ph type="sldImg" idx="2"/>
+          </p:nvPr>
+        </p:nvSpPr>
+        <p:spPr/>
+      </p:sp>
+      <p:sp>
+        <p:nvSpPr>
+          <p:cNvPr id="3" name="Notes Placeholder 2"/>
+          <p:cNvSpPr>
+            <a:spLocks noGrp="1"/>
+          </p:cNvSpPr>
+          <p:nvPr>
+            <p:ph type="body" idx="3" sz="quarter"/>
+          </p:nvPr>
+        </p:nvSpPr>
+        <p:spPr/>
+        <p:txBody>
+          <a:bodyPr/>
+          <a:lstStyle/>
+          <a:p>
+            <a:r>
+              <a:t>TEACHING PURPOSE</a:t>
+            </a:r>
+          </a:p>
+          <a:p>
+            <a:r>
+              <a:t>Derived value</a:t>
+            </a:r>
+          </a:p>
+          <a:p>
+            <a:r>
+              <a:t/>
+            </a:r>
+          </a:p>
+          <a:p>
+            <a:r>
+              <a:t>CONNECT</a:t>
+            </a:r>
+          </a:p>
+          <a:p>
+            <a:r>
+              <a:t>Build on the preceding slide: HAVING.</a:t>
+            </a:r>
+          </a:p>
+          <a:p>
+            <a:r>
+              <a:t/>
+            </a:r>
+          </a:p>
+          <a:p>
+            <a:r>
+              <a:t>LECTURER CUE</a:t>
+            </a:r>
+          </a:p>
+          <a:p>
+            <a:r>
               <a:t>A number the data does not store, computed from columns that it does.</a:t>
+            </a:r>
+          </a:p>
+          <a:p>
+            <a:r>
+              <a:t/>
+            </a:r>
+          </a:p>
+          <a:p>
+            <a:r>
+              <a:t>EXPLAIN IN ORDINARY WORDS</a:t>
+            </a:r>
+          </a:p>
+          <a:p>
+            <a:r>
+              <a:t>Read each quantity and unit before using a formula. Python calculates numbers but does not enforce physical units. Parentheses specify which operation happens first.</a:t>
+            </a:r>
+          </a:p>
+          <a:p>
+            <a:r>
+              <a:t/>
+            </a:r>
+          </a:p>
+          <a:p>
+            <a:r>
+              <a:t>CHECK AND EXPECTED ANSWER</a:t>
+            </a:r>
+          </a:p>
+          <a:p>
+            <a:r>
+              <a:t>What is 5 m times 3 m? 15 square metres. What is 7/2 in Python? 3.5; 7//2 is 3.</a:t>
+            </a:r>
+          </a:p>
+          <a:p>
+            <a:r>
+              <a:t/>
+            </a:r>
+          </a:p>
+          <a:p>
+            <a:r>
+              <a:t>IF LEARNERS ARE STUCK</a:t>
+            </a:r>
+          </a:p>
+          <a:p>
+            <a:r>
+              <a:t>Write the formula and units on paper, substitute small values, then translate it to Python. Check zero denominators and the issued sign convention.</a:t>
+            </a:r>
+          </a:p>
+          <a:p>
+            <a:r>
+              <a:t/>
+            </a:r>
+          </a:p>
+          <a:p>
+            <a:r>
+              <a:t>NEXT</a:t>
+            </a:r>
+          </a:p>
+          <a:p>
+            <a:r>
+              <a:t>The same answer, both ways. Move on after a learner can explain the current example or required action.</a:t>
             </a:r>
           </a:p>
         </p:txBody>
@@ -6374,7 +8347,7 @@
                 </a:solidFill>
                 <a:latin typeface="Calibri"/>
               </a:rPr>
-              <a:t>HAVING, and the difference between filtering rows and filtering groups, demonstrated by getting it wrong first and reading the error out loud. Then revenue, which is not a column: the definition used for the rest of the </a:t>
+              <a:t>HAVING, and the difference between filtering rows and filtering groups, demonstrated by getting it wrong first and reading the error out loud.</a:t>
             </a:r>
           </a:p>
         </p:txBody>
@@ -7432,7 +9405,7 @@
 </file>
 
 <file path=ppt/slides/slide16.xml><?xml version="1.0" encoding="utf-8"?>
-<p:sld xmlns:a="http://schemas.openxmlformats.org/drawingml/2006/main" xmlns:p="http://schemas.openxmlformats.org/presentationml/2006/main" xmlns:r="http://schemas.openxmlformats.org/officeDocument/2006/relationships">
+<p:sld xmlns:a="http://schemas.openxmlformats.org/drawingml/2006/main" xmlns:p="http://schemas.openxmlformats.org/presentationml/2006/main">
   <p:cSld>
     <p:spTree>
       <p:nvGrpSpPr>
@@ -7517,7 +9490,7 @@
                 </a:solidFill>
                 <a:latin typeface="Cambria"/>
               </a:rPr>
-              <a:t>Why you must never average an average</a:t>
+              <a:t>When averaging averages gives a wrong result</a:t>
             </a:r>
           </a:p>
         </p:txBody>
@@ -8259,7 +10232,7 @@
                 </a:solidFill>
                 <a:latin typeface="Calibri"/>
               </a:rPr>
-              <a:t>The rule: sum the top, sum the bottom, then divide. Never average an average unless the groups are the same size.</a:t>
+              <a:t>Combined mean: total sum divided by total count.</a:t>
             </a:r>
           </a:p>
         </p:txBody>
@@ -8461,7 +10434,7 @@
         <p:spPr>
           <a:xfrm>
             <a:off x="685800" y="1600200"/>
-            <a:ext cx="10820095" cy="1604837"/>
+            <a:ext cx="10820095" cy="2107757"/>
           </a:xfrm>
           <a:prstGeom prst="rect">
             <a:avLst/>
@@ -8502,7 +10475,7 @@
         </p:nvSpPr>
         <p:spPr>
           <a:xfrm>
-            <a:off x="685800" y="3296477"/>
+            <a:off x="685800" y="3982277"/>
             <a:ext cx="10820095" cy="457200"/>
           </a:xfrm>
           <a:prstGeom prst="rect">
@@ -11608,7 +13581,7 @@
         <p:spPr>
           <a:xfrm>
             <a:off x="685800" y="1911095"/>
-            <a:ext cx="10820095" cy="1243584"/>
+            <a:ext cx="10820095" cy="1617199"/>
           </a:xfrm>
           <a:prstGeom prst="roundRect">
             <a:avLst>
@@ -11653,7 +13626,7 @@
         <p:spPr>
           <a:xfrm>
             <a:off x="978408" y="2112264"/>
-            <a:ext cx="10234879" cy="877823"/>
+            <a:ext cx="10234879" cy="1251439"/>
           </a:xfrm>
           <a:prstGeom prst="rect">
             <a:avLst/>
@@ -11694,7 +13667,7 @@
         </p:nvSpPr>
         <p:spPr>
           <a:xfrm>
-            <a:off x="685800" y="3465575"/>
+            <a:off x="685800" y="3802615"/>
             <a:ext cx="10820095" cy="310896"/>
           </a:xfrm>
           <a:prstGeom prst="rect">
@@ -11720,7 +13693,7 @@
                 </a:solidFill>
                 <a:latin typeface="Calibri"/>
               </a:rPr>
-              <a:t>Work these questions in order:</a:t>
+              <a:t>Work these questions in order</a:t>
             </a:r>
           </a:p>
         </p:txBody>
@@ -11733,8 +13706,8 @@
         </p:nvSpPr>
         <p:spPr>
           <a:xfrm>
-            <a:off x="685800" y="3886200"/>
-            <a:ext cx="5227167" cy="365760"/>
+            <a:off x="685800" y="4278103"/>
+            <a:ext cx="5227167" cy="385501"/>
           </a:xfrm>
           <a:prstGeom prst="rect">
             <a:avLst/>
@@ -11762,7 +13735,7 @@
                 </a:solidFill>
                 <a:latin typeface="Calibri"/>
               </a:rPr>
-              <a:t>→  Revenue by channel, delivered only.</a:t>
+              <a:t>Revenue by channel, delivered only.</a:t>
             </a:r>
           </a:p>
         </p:txBody>
@@ -11775,8 +13748,8 @@
         </p:nvSpPr>
         <p:spPr>
           <a:xfrm>
-            <a:off x="685800" y="4306824"/>
-            <a:ext cx="5227167" cy="365760"/>
+            <a:off x="685800" y="4755045"/>
+            <a:ext cx="5227167" cy="385501"/>
           </a:xfrm>
           <a:prstGeom prst="rect">
             <a:avLst/>
@@ -11804,7 +13777,7 @@
                 </a:solidFill>
                 <a:latin typeface="Calibri"/>
               </a:rPr>
-              <a:t>→  Revenue by customer segment, delivered only.</a:t>
+              <a:t>Revenue by customer segment, delivered only.</a:t>
             </a:r>
           </a:p>
         </p:txBody>
@@ -11817,8 +13790,8 @@
         </p:nvSpPr>
         <p:spPr>
           <a:xfrm>
-            <a:off x="685800" y="4727448"/>
-            <a:ext cx="5227167" cy="365760"/>
+            <a:off x="685800" y="5231987"/>
+            <a:ext cx="5227167" cy="385501"/>
           </a:xfrm>
           <a:prstGeom prst="rect">
             <a:avLst/>
@@ -11846,7 +13819,7 @@
                 </a:solidFill>
                 <a:latin typeface="Calibri"/>
               </a:rPr>
-              <a:t>→  Revenue by month for 2025.</a:t>
+              <a:t>Revenue by month for 2025.</a:t>
             </a:r>
           </a:p>
         </p:txBody>
@@ -11859,8 +13832,8 @@
         </p:nvSpPr>
         <p:spPr>
           <a:xfrm>
-            <a:off x="6278727" y="3886200"/>
-            <a:ext cx="5227167" cy="365760"/>
+            <a:off x="6278727" y="4278103"/>
+            <a:ext cx="5227167" cy="385501"/>
           </a:xfrm>
           <a:prstGeom prst="rect">
             <a:avLst/>
@@ -11888,7 +13861,7 @@
                 </a:solidFill>
                 <a:latin typeface="Calibri"/>
               </a:rPr>
-              <a:t>→  The same three as pivot tables from the exported CSV.</a:t>
+              <a:t>The same three as pivot tables from the exported CSV.</a:t>
             </a:r>
           </a:p>
         </p:txBody>
@@ -11901,8 +13874,8 @@
         </p:nvSpPr>
         <p:spPr>
           <a:xfrm>
-            <a:off x="6278727" y="4306824"/>
-            <a:ext cx="5227167" cy="365760"/>
+            <a:off x="6278727" y="4755045"/>
+            <a:ext cx="5227167" cy="385501"/>
           </a:xfrm>
           <a:prstGeom prst="rect">
             <a:avLst/>
@@ -11930,7 +13903,7 @@
                 </a:solidFill>
                 <a:latin typeface="Calibri"/>
               </a:rPr>
-              <a:t>→  Any disagreement: which one is wrong, and why?</a:t>
+              <a:t>Any disagreement: which one is wrong, and why?</a:t>
             </a:r>
           </a:p>
         </p:txBody>
@@ -14579,7 +16552,7 @@
                 </a:solidFill>
                 <a:latin typeface="Calibri"/>
               </a:rPr>
-              <a:t>This session is a pivot table, written down. Say that first: the room already knows what they want, and GROUP BY is the vocabulary for it. COUNT, SUM, AVG, MIN, MAX, then GROUP BY on one column, then two, with the pivot </a:t>
+              <a:t>This session is a pivot table, written down.</a:t>
             </a:r>
           </a:p>
         </p:txBody>
